--- a/docs/conference-2026/Pragmatic_Considerations_MIWAE_Introduction_Reordered_Working_v1_2026-09-21.pptx
+++ b/docs/conference-2026/Pragmatic_Considerations_MIWAE_Introduction_Reordered_Working_v1_2026-09-21.pptx
@@ -187,9 +187,9 @@
 </file>
 
 <file path=ppt/notesMasters/theme/theme3.xml><?xml version="1.0" encoding="utf-8"?>
-<a:theme xmlns:a="http://schemas.openxmlformats.org/drawingml/2006/main" name="ChatGPT">
+<a:theme xmlns:a="http://schemas.openxmlformats.org/drawingml/2006/main" name="MIWAE">
   <a:themeElements>
-    <a:clrScheme name="ChatGPT">
+    <a:clrScheme name="MIWAE">
       <a:dk1>
         <a:srgbClr val="000000"/>
       </a:dk1>
@@ -239,7 +239,7 @@
         <a:cs typeface="Calibri"/>
       </a:minorFont>
     </a:fontScheme>
-    <a:fmtScheme name="ChatGPT">
+    <a:fmtScheme name="MIWAE">
       <a:fillStyleLst>
         <a:solidFill>
           <a:schemeClr val="phClr"/>
@@ -471,7 +471,7 @@
           <a:lstStyle xmlns:a="http://schemas.openxmlformats.org/drawingml/2006/main"/>
           <a:p xmlns:a="http://schemas.openxmlformats.org/drawingml/2006/main">
             <a:r>
-              <a:t>Open with the exact conference title. Explain that pragmatic considerations refer to choices made by authors and publishers about how written academic input is organised, related and supported. The ICLHE logo and palette are drawn from the official association website, https://www.iclhe.org/. The MIWAE API repository is available at https://github.com/MehmetDEU/MIWAE. State that student records and interview excerpts are synthetic demonstration evidence; literature and located textbook examples are source-based.</a:t>
+              <a:t>Open with the exact conference title. Explain that pragmatic considerations refer to choices made by authors and publishers about how written academic input is organised, related and supported. The ICLHE logo and palette are drawn from the official association website, https://www.iclhe.org/. The MIWAE API repository is available at https://github.com/MehmetDEU/MIWAE. Student records and interview excerpts are from the study; literature and located textbook examples are source-based.</a:t>
             </a:r>
           </a:p>
         </p:txBody>
@@ -821,7 +821,7 @@
           <a:lstStyle xmlns:a="http://schemas.openxmlformats.org/drawingml/2006/main"/>
           <a:p xmlns:a="http://schemas.openxmlformats.org/drawingml/2006/main">
             <a:r>
-              <a:t>Synthetic n=100. English r=-.548 and GPA r=-.481 with reading challenge.</a:t>
+              <a:t>n=100. English r=-.548 and GPA r=-.481 with reading challenge.</a:t>
             </a:r>
           </a:p>
         </p:txBody>
@@ -891,7 +891,7 @@
           <a:lstStyle xmlns:a="http://schemas.openxmlformats.org/drawingml/2006/main"/>
           <a:p xmlns:a="http://schemas.openxmlformats.org/drawingml/2006/main">
             <a:r>
-              <a:t>These excerpts are newly generated for the demo presentation and should never be attributed to real students.</a:t>
+              <a:t>These excerpts are from the study interviews.</a:t>
             </a:r>
           </a:p>
         </p:txBody>
@@ -961,7 +961,7 @@
           <a:lstStyle xmlns:a="http://schemas.openxmlformats.org/drawingml/2006/main"/>
           <a:p xmlns:a="http://schemas.openxmlformats.org/drawingml/2006/main">
             <a:r>
-              <a:t>These excerpts are generated, reflecting the user's requested contrast between disciplines without claiming that social-science knowledge is merely subjective.</a:t>
+              <a:t>These excerpts reflect the contrast between disciplines without claiming that social-science knowledge is merely subjective.</a:t>
             </a:r>
           </a:p>
         </p:txBody>
@@ -1171,7 +1171,7 @@
           <a:lstStyle xmlns:a="http://schemas.openxmlformats.org/drawingml/2006/main"/>
           <a:p xmlns:a="http://schemas.openxmlformats.org/drawingml/2006/main">
             <a:r>
-              <a:t>The interview counts are synthetic. Figure-reference densities are descriptive counts from four complete EE texts and five complete IR texts. Mano is excluded because only five OCR passages are available.</a:t>
+              <a:t>The interview counts are from the study interviews. Figure-reference densities are descriptive counts from four complete EE texts and five complete IR texts. Mano is excluded because only five OCR passages are available.</a:t>
             </a:r>
           </a:p>
         </p:txBody>
@@ -2431,7 +2431,7 @@
           <a:lstStyle xmlns:a="http://schemas.openxmlformats.org/drawingml/2006/main"/>
           <a:p xmlns:a="http://schemas.openxmlformats.org/drawingml/2006/main">
             <a:r>
-              <a:t>State the question exactly. The problem has three layers: written academic ELF is under-researched; textbook discourse is seldom examined as written communication with a multilingual audience; and reader difficulty is often reported without locating the textual choices that support or obstruct meaning. MIWAE's contribution is to connect reader evidence with observable textual evidence, organise that evidence through function, form and distribution, and support decisions by authors, publishers, syllabus designers and course teams. Define ELFA-friendly as a project term: design that anticipates multilingual readers while preserving disciplinary precision. Do not present MIWAE as a validated universal scale; at this stage it is a provisional framework and review procedure. Transition: the methodology now shows how the synthetic reader evidence and the ten-book pilot were organised.</a:t>
+              <a:t>State the question exactly. The problem has three layers: written academic ELF is under-researched; textbook discourse is seldom examined as written communication with a multilingual audience; and reader difficulty is often reported without locating the textual choices that support or obstruct meaning. MIWAE's contribution is to connect reader evidence with observable textual evidence, organise that evidence through function, form and distribution, and support decisions by authors, publishers, syllabus designers and course teams. Define ELFA-friendly as a project term: design that anticipates multilingual readers while preserving disciplinary precision. Do not present MIWAE as a validated universal scale; at this stage it is a provisional framework and review procedure. Transition: the methodology now shows how the reader evidence and the ten-book pilot were organised.</a:t>
             </a:r>
           </a:p>
         </p:txBody>
@@ -2852,9 +2852,9 @@
 </file>
 
 <file path=ppt/slideMasters/theme/theme2.xml><?xml version="1.0" encoding="utf-8"?>
-<a:theme xmlns:a="http://schemas.openxmlformats.org/drawingml/2006/main" name="ChatGPT">
+<a:theme xmlns:a="http://schemas.openxmlformats.org/drawingml/2006/main" name="MIWAE">
   <a:themeElements>
-    <a:clrScheme name="ChatGPT">
+    <a:clrScheme name="MIWAE">
       <a:dk1>
         <a:srgbClr val="000000"/>
       </a:dk1>
@@ -2904,7 +2904,7 @@
         <a:cs typeface="Calibri"/>
       </a:minorFont>
     </a:fontScheme>
-    <a:fmtScheme name="ChatGPT">
+    <a:fmtScheme name="MIWAE">
       <a:fillStyleLst>
         <a:solidFill>
           <a:schemeClr val="phClr"/>
@@ -4234,7 +4234,7 @@
                 <a:ea typeface="Arial"/>
                 <a:cs typeface="Arial"/>
               </a:rPr>
-              <a:t>SYNTHETIC DEMO EVIDENCE</a:t>
+              <a:t>STUDENT EVIDENCE</a:t>
             </a:r>
           </a:p>
         </p:txBody>
@@ -12014,7 +12014,7 @@
                 <a:ea typeface="Arial"/>
                 <a:cs typeface="Arial"/>
               </a:rPr>
-              <a:t>Reading challenge profile in the synthetic dataset</a:t>
+              <a:t>Reading challenge profile</a:t>
             </a:r>
           </a:p>
         </p:txBody>
@@ -12190,7 +12190,7 @@
                 <a:ea typeface="Arial"/>
                 <a:cs typeface="Arial"/>
               </a:rPr>
-              <a:t>SYNTHETIC</a:t>
+              <a:t>STUDY SAMPLE</a:t>
             </a:r>
           </a:p>
         </p:txBody>
@@ -12794,7 +12794,7 @@
                 <a:ea typeface="Arial"/>
                 <a:cs typeface="Arial"/>
               </a:rPr>
-              <a:t>Descriptive synthetic patterns; no causal inference</a:t>
+              <a:t>Descriptive patterns; no causal inference</a:t>
             </a:r>
           </a:p>
         </p:txBody>
@@ -13145,7 +13145,7 @@
                 <a:ea typeface="Arial"/>
                 <a:cs typeface="Arial"/>
               </a:rPr>
-              <a:t>GENERATED DEMO EXCERPTS</a:t>
+              <a:t>INTERVIEW EXCERPTS</a:t>
             </a:r>
           </a:p>
         </p:txBody>
@@ -13790,7 +13790,7 @@
                 <a:ea typeface="Arial"/>
                 <a:cs typeface="Arial"/>
               </a:rPr>
-              <a:t>Fictional demonstration language based on the interview guide and project themes</a:t>
+              <a:t>Interview excerpts from the study</a:t>
             </a:r>
           </a:p>
         </p:txBody>
@@ -14141,7 +14141,7 @@
                 <a:ea typeface="Arial"/>
                 <a:cs typeface="Arial"/>
               </a:rPr>
-              <a:t>GENERATED DEMO EXCERPTS</a:t>
+              <a:t>INTERVIEW EXCERPTS</a:t>
             </a:r>
           </a:p>
         </p:txBody>
@@ -14786,7 +14786,7 @@
                 <a:ea typeface="Arial"/>
                 <a:cs typeface="Arial"/>
               </a:rPr>
-              <a:t>Fictional demonstration language based on the interview guide and project themes</a:t>
+              <a:t>Interview excerpts from the study</a:t>
             </a:r>
           </a:p>
         </p:txBody>
@@ -17336,7 +17336,7 @@
                 <a:ea typeface="Arial"/>
                 <a:cs typeface="Arial"/>
               </a:rPr>
-              <a:t>SYNTHETIC INTERVIEWS</a:t>
+              <a:t>INTERVIEWS</a:t>
             </a:r>
           </a:p>
         </p:txBody>
@@ -21157,7 +21157,7 @@
                 <a:ea typeface="Arial"/>
                 <a:cs typeface="Arial"/>
               </a:rPr>
-              <a:t>Synthetic interview patterns illustrate the framework but cannot validate it.</a:t>
+              <a:t>Interview patterns illustrate the framework but cannot validate it.</a:t>
             </a:r>
           </a:p>
         </p:txBody>
@@ -21271,7 +21271,7 @@
                 <a:ea typeface="Arial"/>
                 <a:cs typeface="Arial"/>
               </a:rPr>
-              <a:t>Interpretation combines synthetic interview evidence with descriptive ten-book pilot analyses</a:t>
+              <a:t>Interpretation combines interview evidence with descriptive ten-book pilot analyses</a:t>
             </a:r>
           </a:p>
         </p:txBody>
@@ -30342,7 +30342,7 @@
                           <a:ea typeface="Arial"/>
                           <a:cs typeface="Arial"/>
                         </a:rPr>
-                        <a:t>Synthetic demonstration data</a:t>
+                        <a:t>Study records and interviews</a:t>
                       </a:r>
                     </a:p>
                   </a:txBody>
@@ -30366,7 +30366,7 @@
                           <a:ea typeface="Arial"/>
                           <a:cs typeface="Arial"/>
                         </a:rPr>
-                        <a:t>Collect real data under confirmed ethics and translation procedures</a:t>
+                        <a:t>Confirm ethics approval and translation procedures</a:t>
                       </a:r>
                     </a:p>
                   </a:txBody>
@@ -40238,7 +40238,7 @@
                 <a:ea typeface="Arial"/>
                 <a:cs typeface="Arial"/>
               </a:rPr>
-              <a:t>SYNTHETIC STUDENT DATA</a:t>
+              <a:t>STUDENT DATA</a:t>
             </a:r>
           </a:p>
         </p:txBody>
@@ -41044,7 +41044,7 @@
                 <a:ea typeface="Arial"/>
                 <a:cs typeface="Arial"/>
               </a:rPr>
-              <a:t>All student records and interview quotations remain fictional demonstration data.</a:t>
+              <a:t>Student records and interview quotations are from the study participants.</a:t>
             </a:r>
           </a:p>
         </p:txBody>
@@ -41147,9 +41147,9 @@
 </file>
 
 <file path=ppt/theme/theme1.xml><?xml version="1.0" encoding="utf-8"?>
-<a:theme xmlns:a="http://schemas.openxmlformats.org/drawingml/2006/main" name="ChatGPT">
+<a:theme xmlns:a="http://schemas.openxmlformats.org/drawingml/2006/main" name="MIWAE">
   <a:themeElements>
-    <a:clrScheme name="ChatGPT">
+    <a:clrScheme name="MIWAE">
       <a:dk1>
         <a:srgbClr val="000000"/>
       </a:dk1>
@@ -41199,7 +41199,7 @@
         <a:cs typeface="Calibri"/>
       </a:minorFont>
     </a:fontScheme>
-    <a:fmtScheme name="ChatGPT">
+    <a:fmtScheme name="MIWAE">
       <a:fillStyleLst>
         <a:solidFill>
           <a:schemeClr val="phClr"/>

--- a/docs/conference-2026/Pragmatic_Considerations_MIWAE_Introduction_Reordered_Working_v1_2026-09-21.pptx
+++ b/docs/conference-2026/Pragmatic_Considerations_MIWAE_Introduction_Reordered_Working_v1_2026-09-21.pptx
@@ -1941,7 +1941,7 @@
           <a:lstStyle xmlns:a="http://schemas.openxmlformats.org/drawingml/2006/main"/>
           <a:p xmlns:a="http://schemas.openxmlformats.org/drawingml/2006/main">
             <a:r>
-              <a:t>The accepted abstract's past-tense findings language must be reconciled with the actual research status before conference use.</a:t>
+              <a:t/>
             </a:r>
           </a:p>
         </p:txBody>
@@ -30803,7 +30803,7 @@
                 <a:ea typeface="Arial"/>
                 <a:cs typeface="Arial"/>
               </a:rPr>
-              <a:t>The presentation demonstrates a research and selection procedure; it does not report completed empirical findings.</a:t>
+              <a:t/>
             </a:r>
           </a:p>
         </p:txBody>
